--- a/examples/ppt/charts/charts-pie.pptx
+++ b/examples/ppt/charts/charts-pie.pptx
@@ -5,14 +5,14 @@
     <p:sldMasterId xmlns:r="http://schemas.openxmlformats.org/officeDocument/2006/relationships" id="2147483648" r:id="rId1"/>
   </p:sldMasterIdLst>
   <p:sldIdLst>
-    <p:sldId id="256" r:id="R497efcc12293457a"/>
-    <p:sldId id="257" r:id="R6b500379f9494a0b"/>
-    <p:sldId id="258" r:id="R014a6f6cb7184ad4"/>
-    <p:sldId id="259" r:id="Rc8e0b7503e6d454c"/>
-    <p:sldId id="260" r:id="R6bb2728cc3c74bf2"/>
-    <p:sldId id="261" r:id="R52655c9cb264495f"/>
-    <p:sldId id="262" r:id="R7c95c4a3357c42f5"/>
-    <p:sldId id="263" r:id="Rda7dfb1b85b74704"/>
+    <p:sldId id="256" r:id="R19a3feec2a014e42"/>
+    <p:sldId id="257" r:id="R0b79785829894c98"/>
+    <p:sldId id="258" r:id="Rdc6e26ea2e904a44"/>
+    <p:sldId id="259" r:id="R6a1b2d766d5342c3"/>
+    <p:sldId id="260" r:id="R4cbc3a5e854e47c1"/>
+    <p:sldId id="261" r:id="R85858be90fba47fe"/>
+    <p:sldId id="262" r:id="Raf6bf3631ece4aa0"/>
+    <p:sldId id="263" r:id="R0711217e8a234edc"/>
   </p:sldIdLst>
   <p:sldSz cx="12192000" cy="6858000"/>
   <p:notesSz cx="6858000" cy="9144000"/>
@@ -287,7 +287,7 @@
 </file>
 
 <file path=ppt/slideMasters/slideMaster1.xml><?xml version="1.0" encoding="utf-8"?>
-<p:sldMaster xmlns:p="http://schemas.openxmlformats.org/presentationml/2006/main">
+<p:sldMaster xmlns:r="http://schemas.openxmlformats.org/officeDocument/2006/relationships" xmlns:p="http://schemas.openxmlformats.org/presentationml/2006/main">
   <p:cSld>
     <p:spTree>
       <p:nvGrpSpPr>
@@ -692,10 +692,12 @@
             <a:lstStyle xmlns:a="http://schemas.openxmlformats.org/drawingml/2006/main"/>
             <a:p xmlns:a="http://schemas.openxmlformats.org/drawingml/2006/main">
               <a:pPr>
-                <a:defRPr sz="1000" b="0">
+                <a:defRPr sz="1000">
                   <a:solidFill>
                     <a:srgbClr val="333333"/>
                   </a:solidFill>
+                  <a:latin typeface="Calibri"/>
+                  <a:ea typeface="Calibri"/>
                 </a:defRPr>
               </a:pPr>
             </a:p>
@@ -791,10 +793,12 @@
             <a:lstStyle xmlns:a="http://schemas.openxmlformats.org/drawingml/2006/main"/>
             <a:p xmlns:a="http://schemas.openxmlformats.org/drawingml/2006/main">
               <a:pPr>
-                <a:defRPr sz="1000" b="0">
+                <a:defRPr sz="1000">
                   <a:solidFill>
                     <a:srgbClr val="333333"/>
                   </a:solidFill>
+                  <a:latin typeface="Calibri"/>
+                  <a:ea typeface="Calibri"/>
                 </a:defRPr>
               </a:pPr>
             </a:p>
@@ -3236,8 +3240,8 @@
       <p:grpSpPr/>
       <p:sp>
         <p:nvSpPr>
-          <p:cNvPr id="10000" name="TextBox 1"/>
-          <p:cNvSpPr/>
+          <p:cNvPr id="100000" name="TextBox 1"/>
+          <p:cNvSpPr txBox="1"/>
           <p:nvPr/>
         </p:nvSpPr>
         <p:spPr>
@@ -3264,7 +3268,7 @@
       </p:sp>
       <p:graphicFrame>
         <p:nvGraphicFramePr>
-          <p:cNvPr id="10001" name="pie"/>
+          <p:cNvPr id="100001" name="pie"/>
           <p:cNvGraphicFramePr/>
           <p:nvPr/>
         </p:nvGraphicFramePr>
@@ -3274,13 +3278,13 @@
         </p:xfrm>
         <a:graphic xmlns:a="http://schemas.openxmlformats.org/drawingml/2006/main">
           <a:graphicData uri="http://schemas.openxmlformats.org/drawingml/2006/chart">
-            <c:chart xmlns:r="http://schemas.openxmlformats.org/officeDocument/2006/relationships" xmlns:c="http://schemas.openxmlformats.org/drawingml/2006/chart" r:id="R85b0e9ad4df24724"/>
+            <c:chart xmlns:r="http://schemas.openxmlformats.org/officeDocument/2006/relationships" xmlns:c="http://schemas.openxmlformats.org/drawingml/2006/chart" r:id="Redc8cef0ad674535"/>
           </a:graphicData>
         </a:graphic>
       </p:graphicFrame>
       <p:graphicFrame>
         <p:nvGraphicFramePr>
-          <p:cNvPr id="10002" name="pie3d (view3d=20,20,30)"/>
+          <p:cNvPr id="100002" name="pie3d (view3d=20,20,30)"/>
           <p:cNvGraphicFramePr/>
           <p:nvPr/>
         </p:nvGraphicFramePr>
@@ -3290,13 +3294,13 @@
         </p:xfrm>
         <a:graphic xmlns:a="http://schemas.openxmlformats.org/drawingml/2006/main">
           <a:graphicData uri="http://schemas.openxmlformats.org/drawingml/2006/chart">
-            <c:chart xmlns:r="http://schemas.openxmlformats.org/officeDocument/2006/relationships" xmlns:c="http://schemas.openxmlformats.org/drawingml/2006/chart" r:id="R6f5d4c54c4b24da7"/>
+            <c:chart xmlns:r="http://schemas.openxmlformats.org/officeDocument/2006/relationships" xmlns:c="http://schemas.openxmlformats.org/drawingml/2006/chart" r:id="R3fe5fa197f714385"/>
           </a:graphicData>
         </a:graphic>
       </p:graphicFrame>
       <p:graphicFrame>
         <p:nvGraphicFramePr>
-          <p:cNvPr id="10003" name="firstSliceAngle=90"/>
+          <p:cNvPr id="100003" name="firstSliceAngle=90"/>
           <p:cNvGraphicFramePr/>
           <p:nvPr/>
         </p:nvGraphicFramePr>
@@ -3306,13 +3310,13 @@
         </p:xfrm>
         <a:graphic xmlns:a="http://schemas.openxmlformats.org/drawingml/2006/main">
           <a:graphicData uri="http://schemas.openxmlformats.org/drawingml/2006/chart">
-            <c:chart xmlns:r="http://schemas.openxmlformats.org/officeDocument/2006/relationships" xmlns:c="http://schemas.openxmlformats.org/drawingml/2006/chart" r:id="R1f773289c2774dd8"/>
+            <c:chart xmlns:r="http://schemas.openxmlformats.org/officeDocument/2006/relationships" xmlns:c="http://schemas.openxmlformats.org/drawingml/2006/chart" r:id="R3d22d27e0fe4424c"/>
           </a:graphicData>
         </a:graphic>
       </p:graphicFrame>
       <p:graphicFrame>
         <p:nvGraphicFramePr>
-          <p:cNvPr id="10004" name="varyColors=false"/>
+          <p:cNvPr id="100004" name="varyColors=false"/>
           <p:cNvGraphicFramePr/>
           <p:nvPr/>
         </p:nvGraphicFramePr>
@@ -3322,7 +3326,7 @@
         </p:xfrm>
         <a:graphic xmlns:a="http://schemas.openxmlformats.org/drawingml/2006/main">
           <a:graphicData uri="http://schemas.openxmlformats.org/drawingml/2006/chart">
-            <c:chart xmlns:r="http://schemas.openxmlformats.org/officeDocument/2006/relationships" xmlns:c="http://schemas.openxmlformats.org/drawingml/2006/chart" r:id="R8fa4d570de064b19"/>
+            <c:chart xmlns:r="http://schemas.openxmlformats.org/officeDocument/2006/relationships" xmlns:c="http://schemas.openxmlformats.org/drawingml/2006/chart" r:id="R9303c3e908cb4cad"/>
           </a:graphicData>
         </a:graphic>
       </p:graphicFrame>
@@ -3343,8 +3347,8 @@
       <p:grpSpPr/>
       <p:sp>
         <p:nvSpPr>
-          <p:cNvPr id="10005" name="TextBox 1"/>
-          <p:cNvSpPr/>
+          <p:cNvPr id="100005" name="TextBox 1"/>
+          <p:cNvSpPr txBox="1"/>
           <p:nvPr/>
         </p:nvSpPr>
         <p:spPr>
@@ -3371,7 +3375,7 @@
       </p:sp>
       <p:graphicFrame>
         <p:nvGraphicFramePr>
-          <p:cNvPr id="10006" name="explosion=0"/>
+          <p:cNvPr id="100006" name="explosion=0"/>
           <p:cNvGraphicFramePr/>
           <p:nvPr/>
         </p:nvGraphicFramePr>
@@ -3381,13 +3385,13 @@
         </p:xfrm>
         <a:graphic xmlns:a="http://schemas.openxmlformats.org/drawingml/2006/main">
           <a:graphicData uri="http://schemas.openxmlformats.org/drawingml/2006/chart">
-            <c:chart xmlns:r="http://schemas.openxmlformats.org/officeDocument/2006/relationships" xmlns:c="http://schemas.openxmlformats.org/drawingml/2006/chart" r:id="Rb7da69896743449f"/>
+            <c:chart xmlns:r="http://schemas.openxmlformats.org/officeDocument/2006/relationships" xmlns:c="http://schemas.openxmlformats.org/drawingml/2006/chart" r:id="R82bb768312694559"/>
           </a:graphicData>
         </a:graphic>
       </p:graphicFrame>
       <p:graphicFrame>
         <p:nvGraphicFramePr>
-          <p:cNvPr id="10007" name="explosion=10"/>
+          <p:cNvPr id="100007" name="explosion=10"/>
           <p:cNvGraphicFramePr/>
           <p:nvPr/>
         </p:nvGraphicFramePr>
@@ -3397,13 +3401,13 @@
         </p:xfrm>
         <a:graphic xmlns:a="http://schemas.openxmlformats.org/drawingml/2006/main">
           <a:graphicData uri="http://schemas.openxmlformats.org/drawingml/2006/chart">
-            <c:chart xmlns:r="http://schemas.openxmlformats.org/officeDocument/2006/relationships" xmlns:c="http://schemas.openxmlformats.org/drawingml/2006/chart" r:id="Rc5f32307d1264a79"/>
+            <c:chart xmlns:r="http://schemas.openxmlformats.org/officeDocument/2006/relationships" xmlns:c="http://schemas.openxmlformats.org/drawingml/2006/chart" r:id="Rb237a193dc48470e"/>
           </a:graphicData>
         </a:graphic>
       </p:graphicFrame>
       <p:graphicFrame>
         <p:nvGraphicFramePr>
-          <p:cNvPr id="10008" name="explosion=20"/>
+          <p:cNvPr id="100008" name="explosion=20"/>
           <p:cNvGraphicFramePr/>
           <p:nvPr/>
         </p:nvGraphicFramePr>
@@ -3413,13 +3417,13 @@
         </p:xfrm>
         <a:graphic xmlns:a="http://schemas.openxmlformats.org/drawingml/2006/main">
           <a:graphicData uri="http://schemas.openxmlformats.org/drawingml/2006/chart">
-            <c:chart xmlns:r="http://schemas.openxmlformats.org/officeDocument/2006/relationships" xmlns:c="http://schemas.openxmlformats.org/drawingml/2006/chart" r:id="R712054dc20994a79"/>
+            <c:chart xmlns:r="http://schemas.openxmlformats.org/officeDocument/2006/relationships" xmlns:c="http://schemas.openxmlformats.org/drawingml/2006/chart" r:id="R95c656c004d74e31"/>
           </a:graphicData>
         </a:graphic>
       </p:graphicFrame>
       <p:graphicFrame>
         <p:nvGraphicFramePr>
-          <p:cNvPr id="10009" name="explosion=30"/>
+          <p:cNvPr id="100009" name="explosion=30"/>
           <p:cNvGraphicFramePr/>
           <p:nvPr/>
         </p:nvGraphicFramePr>
@@ -3429,7 +3433,7 @@
         </p:xfrm>
         <a:graphic xmlns:a="http://schemas.openxmlformats.org/drawingml/2006/main">
           <a:graphicData uri="http://schemas.openxmlformats.org/drawingml/2006/chart">
-            <c:chart xmlns:r="http://schemas.openxmlformats.org/officeDocument/2006/relationships" xmlns:c="http://schemas.openxmlformats.org/drawingml/2006/chart" r:id="R3f006313e2204396"/>
+            <c:chart xmlns:r="http://schemas.openxmlformats.org/officeDocument/2006/relationships" xmlns:c="http://schemas.openxmlformats.org/drawingml/2006/chart" r:id="Ra1018efdcd054181"/>
           </a:graphicData>
         </a:graphic>
       </p:graphicFrame>
@@ -3450,8 +3454,8 @@
       <p:grpSpPr/>
       <p:sp>
         <p:nvSpPr>
-          <p:cNvPr id="10010" name="TextBox 1"/>
-          <p:cNvSpPr/>
+          <p:cNvPr id="100010" name="TextBox 1"/>
+          <p:cNvSpPr txBox="1"/>
           <p:nvPr/>
         </p:nvSpPr>
         <p:spPr>
@@ -3478,7 +3482,7 @@
       </p:sp>
       <p:graphicFrame>
         <p:nvGraphicFramePr>
-          <p:cNvPr id="10011" name="Styled title"/>
+          <p:cNvPr id="100011" name="Styled title"/>
           <p:cNvGraphicFramePr/>
           <p:nvPr/>
         </p:nvGraphicFramePr>
@@ -3488,13 +3492,13 @@
         </p:xfrm>
         <a:graphic xmlns:a="http://schemas.openxmlformats.org/drawingml/2006/main">
           <a:graphicData uri="http://schemas.openxmlformats.org/drawingml/2006/chart">
-            <c:chart xmlns:r="http://schemas.openxmlformats.org/officeDocument/2006/relationships" xmlns:c="http://schemas.openxmlformats.org/drawingml/2006/chart" r:id="R07c2a511b0d647ec"/>
+            <c:chart xmlns:r="http://schemas.openxmlformats.org/officeDocument/2006/relationships" xmlns:c="http://schemas.openxmlformats.org/drawingml/2006/chart" r:id="R01632281025040f0"/>
           </a:graphicData>
         </a:graphic>
       </p:graphicFrame>
       <p:graphicFrame>
         <p:nvGraphicFramePr>
-          <p:cNvPr id="10012" name="legend=bottom + legendFont"/>
+          <p:cNvPr id="100012" name="legend=bottom + legendFont"/>
           <p:cNvGraphicFramePr/>
           <p:nvPr/>
         </p:nvGraphicFramePr>
@@ -3504,13 +3508,13 @@
         </p:xfrm>
         <a:graphic xmlns:a="http://schemas.openxmlformats.org/drawingml/2006/main">
           <a:graphicData uri="http://schemas.openxmlformats.org/drawingml/2006/chart">
-            <c:chart xmlns:r="http://schemas.openxmlformats.org/officeDocument/2006/relationships" xmlns:c="http://schemas.openxmlformats.org/drawingml/2006/chart" r:id="Rc215e6beb9f74de4"/>
+            <c:chart xmlns:r="http://schemas.openxmlformats.org/officeDocument/2006/relationships" xmlns:c="http://schemas.openxmlformats.org/drawingml/2006/chart" r:id="Rdaa0f76b503a4fd3"/>
           </a:graphicData>
         </a:graphic>
       </p:graphicFrame>
       <p:graphicFrame>
         <p:nvGraphicFramePr>
-          <p:cNvPr id="10013" name="legend.overlay=true"/>
+          <p:cNvPr id="100013" name="legend.overlay=true"/>
           <p:cNvGraphicFramePr/>
           <p:nvPr/>
         </p:nvGraphicFramePr>
@@ -3520,13 +3524,13 @@
         </p:xfrm>
         <a:graphic xmlns:a="http://schemas.openxmlformats.org/drawingml/2006/main">
           <a:graphicData uri="http://schemas.openxmlformats.org/drawingml/2006/chart">
-            <c:chart xmlns:r="http://schemas.openxmlformats.org/officeDocument/2006/relationships" xmlns:c="http://schemas.openxmlformats.org/drawingml/2006/chart" r:id="R593d3d5c939a4381"/>
+            <c:chart xmlns:r="http://schemas.openxmlformats.org/officeDocument/2006/relationships" xmlns:c="http://schemas.openxmlformats.org/drawingml/2006/chart" r:id="Ra43f4c5ef99e4756"/>
           </a:graphicData>
         </a:graphic>
       </p:graphicFrame>
       <p:graphicFrame>
         <p:nvGraphicFramePr>
-          <p:cNvPr id="10014" name="Chart 4"/>
+          <p:cNvPr id="100014" name="Chart 4"/>
           <p:cNvGraphicFramePr/>
           <p:nvPr/>
         </p:nvGraphicFramePr>
@@ -3536,7 +3540,7 @@
         </p:xfrm>
         <a:graphic xmlns:a="http://schemas.openxmlformats.org/drawingml/2006/main">
           <a:graphicData uri="http://schemas.openxmlformats.org/drawingml/2006/chart">
-            <c:chart xmlns:r="http://schemas.openxmlformats.org/officeDocument/2006/relationships" xmlns:c="http://schemas.openxmlformats.org/drawingml/2006/chart" r:id="R8a8b8892e8ed4082"/>
+            <c:chart xmlns:r="http://schemas.openxmlformats.org/officeDocument/2006/relationships" xmlns:c="http://schemas.openxmlformats.org/drawingml/2006/chart" r:id="Rf5a6b9dc8a4a4157"/>
           </a:graphicData>
         </a:graphic>
       </p:graphicFrame>
@@ -3557,8 +3561,8 @@
       <p:grpSpPr/>
       <p:sp>
         <p:nvSpPr>
-          <p:cNvPr id="10015" name="TextBox 1"/>
-          <p:cNvSpPr/>
+          <p:cNvPr id="100015" name="TextBox 1"/>
+          <p:cNvSpPr txBox="1"/>
           <p:nvPr/>
         </p:nvSpPr>
         <p:spPr>
@@ -3585,7 +3589,7 @@
       </p:sp>
       <p:graphicFrame>
         <p:nvGraphicFramePr>
-          <p:cNvPr id="10016" name="dataLabels=percent"/>
+          <p:cNvPr id="100016" name="dataLabels=percent"/>
           <p:cNvGraphicFramePr/>
           <p:nvPr/>
         </p:nvGraphicFramePr>
@@ -3595,13 +3599,13 @@
         </p:xfrm>
         <a:graphic xmlns:a="http://schemas.openxmlformats.org/drawingml/2006/main">
           <a:graphicData uri="http://schemas.openxmlformats.org/drawingml/2006/chart">
-            <c:chart xmlns:r="http://schemas.openxmlformats.org/officeDocument/2006/relationships" xmlns:c="http://schemas.openxmlformats.org/drawingml/2006/chart" r:id="R2028df913b564cd5"/>
+            <c:chart xmlns:r="http://schemas.openxmlformats.org/officeDocument/2006/relationships" xmlns:c="http://schemas.openxmlformats.org/drawingml/2006/chart" r:id="Rd92641634d6c4618"/>
           </a:graphicData>
         </a:graphic>
       </p:graphicFrame>
       <p:graphicFrame>
         <p:nvGraphicFramePr>
-          <p:cNvPr id="10017" name="percent,category"/>
+          <p:cNvPr id="100017" name="percent,category"/>
           <p:cNvGraphicFramePr/>
           <p:nvPr/>
         </p:nvGraphicFramePr>
@@ -3611,13 +3615,13 @@
         </p:xfrm>
         <a:graphic xmlns:a="http://schemas.openxmlformats.org/drawingml/2006/main">
           <a:graphicData uri="http://schemas.openxmlformats.org/drawingml/2006/chart">
-            <c:chart xmlns:r="http://schemas.openxmlformats.org/officeDocument/2006/relationships" xmlns:c="http://schemas.openxmlformats.org/drawingml/2006/chart" r:id="R79b1863330924210"/>
+            <c:chart xmlns:r="http://schemas.openxmlformats.org/officeDocument/2006/relationships" xmlns:c="http://schemas.openxmlformats.org/drawingml/2006/chart" r:id="R290f92a00d734517"/>
           </a:graphicData>
         </a:graphic>
       </p:graphicFrame>
       <p:graphicFrame>
         <p:nvGraphicFramePr>
-          <p:cNvPr id="10018" name="all flags"/>
+          <p:cNvPr id="100018" name="all flags"/>
           <p:cNvGraphicFramePr/>
           <p:nvPr/>
         </p:nvGraphicFramePr>
@@ -3627,13 +3631,13 @@
         </p:xfrm>
         <a:graphic xmlns:a="http://schemas.openxmlformats.org/drawingml/2006/main">
           <a:graphicData uri="http://schemas.openxmlformats.org/drawingml/2006/chart">
-            <c:chart xmlns:r="http://schemas.openxmlformats.org/officeDocument/2006/relationships" xmlns:c="http://schemas.openxmlformats.org/drawingml/2006/chart" r:id="R17f399a80fce45d1"/>
+            <c:chart xmlns:r="http://schemas.openxmlformats.org/officeDocument/2006/relationships" xmlns:c="http://schemas.openxmlformats.org/drawingml/2006/chart" r:id="Rb32cc5662eb14e4f"/>
           </a:graphicData>
         </a:graphic>
       </p:graphicFrame>
       <p:graphicFrame>
         <p:nvGraphicFramePr>
-          <p:cNvPr id="10019" name="dataLabels=none"/>
+          <p:cNvPr id="100019" name="dataLabels=none"/>
           <p:cNvGraphicFramePr/>
           <p:nvPr/>
         </p:nvGraphicFramePr>
@@ -3643,7 +3647,7 @@
         </p:xfrm>
         <a:graphic xmlns:a="http://schemas.openxmlformats.org/drawingml/2006/main">
           <a:graphicData uri="http://schemas.openxmlformats.org/drawingml/2006/chart">
-            <c:chart xmlns:r="http://schemas.openxmlformats.org/officeDocument/2006/relationships" xmlns:c="http://schemas.openxmlformats.org/drawingml/2006/chart" r:id="Re8869ed256e748f6"/>
+            <c:chart xmlns:r="http://schemas.openxmlformats.org/officeDocument/2006/relationships" xmlns:c="http://schemas.openxmlformats.org/drawingml/2006/chart" r:id="R256d2145ae48429a"/>
           </a:graphicData>
         </a:graphic>
       </p:graphicFrame>
@@ -3664,8 +3668,8 @@
       <p:grpSpPr/>
       <p:sp>
         <p:nvSpPr>
-          <p:cNvPr id="10020" name="TextBox 1"/>
-          <p:cNvSpPr/>
+          <p:cNvPr id="100020" name="TextBox 1"/>
+          <p:cNvSpPr txBox="1"/>
           <p:nvPr/>
         </p:nvSpPr>
         <p:spPr>
@@ -3692,7 +3696,7 @@
       </p:sp>
       <p:graphicFrame>
         <p:nvGraphicFramePr>
-          <p:cNvPr id="10021" name="colors= explicit palette"/>
+          <p:cNvPr id="100021" name="colors= explicit palette"/>
           <p:cNvGraphicFramePr/>
           <p:nvPr/>
         </p:nvGraphicFramePr>
@@ -3702,13 +3706,13 @@
         </p:xfrm>
         <a:graphic xmlns:a="http://schemas.openxmlformats.org/drawingml/2006/main">
           <a:graphicData uri="http://schemas.openxmlformats.org/drawingml/2006/chart">
-            <c:chart xmlns:r="http://schemas.openxmlformats.org/officeDocument/2006/relationships" xmlns:c="http://schemas.openxmlformats.org/drawingml/2006/chart" r:id="Rc0cfc7e09fe846db"/>
+            <c:chart xmlns:r="http://schemas.openxmlformats.org/officeDocument/2006/relationships" xmlns:c="http://schemas.openxmlformats.org/drawingml/2006/chart" r:id="R4cbf05d9f1b84a73"/>
           </a:graphicData>
         </a:graphic>
       </p:graphicFrame>
       <p:graphicFrame>
         <p:nvGraphicFramePr>
-          <p:cNvPr id="10022" name="gradient + seriesshadow"/>
+          <p:cNvPr id="100022" name="gradient + seriesshadow"/>
           <p:cNvGraphicFramePr/>
           <p:nvPr/>
         </p:nvGraphicFramePr>
@@ -3718,13 +3722,13 @@
         </p:xfrm>
         <a:graphic xmlns:a="http://schemas.openxmlformats.org/drawingml/2006/main">
           <a:graphicData uri="http://schemas.openxmlformats.org/drawingml/2006/chart">
-            <c:chart xmlns:r="http://schemas.openxmlformats.org/officeDocument/2006/relationships" xmlns:c="http://schemas.openxmlformats.org/drawingml/2006/chart" r:id="R6a8085be562a4660"/>
+            <c:chart xmlns:r="http://schemas.openxmlformats.org/officeDocument/2006/relationships" xmlns:c="http://schemas.openxmlformats.org/drawingml/2006/chart" r:id="Rdc007e0302fb4d9e"/>
           </a:graphicData>
         </a:graphic>
       </p:graphicFrame>
       <p:graphicFrame>
         <p:nvGraphicFramePr>
-          <p:cNvPr id="10023" name="seriesoutline white"/>
+          <p:cNvPr id="100023" name="seriesoutline white"/>
           <p:cNvGraphicFramePr/>
           <p:nvPr/>
         </p:nvGraphicFramePr>
@@ -3734,13 +3738,13 @@
         </p:xfrm>
         <a:graphic xmlns:a="http://schemas.openxmlformats.org/drawingml/2006/main">
           <a:graphicData uri="http://schemas.openxmlformats.org/drawingml/2006/chart">
-            <c:chart xmlns:r="http://schemas.openxmlformats.org/officeDocument/2006/relationships" xmlns:c="http://schemas.openxmlformats.org/drawingml/2006/chart" r:id="Rdeec3659aeca42a7"/>
+            <c:chart xmlns:r="http://schemas.openxmlformats.org/officeDocument/2006/relationships" xmlns:c="http://schemas.openxmlformats.org/drawingml/2006/chart" r:id="Re15e43b65aa44a85"/>
           </a:graphicData>
         </a:graphic>
       </p:graphicFrame>
       <p:graphicFrame>
         <p:nvGraphicFramePr>
-          <p:cNvPr id="10024" name="transparency=30"/>
+          <p:cNvPr id="100024" name="transparency=30"/>
           <p:cNvGraphicFramePr/>
           <p:nvPr/>
         </p:nvGraphicFramePr>
@@ -3750,7 +3754,7 @@
         </p:xfrm>
         <a:graphic xmlns:a="http://schemas.openxmlformats.org/drawingml/2006/main">
           <a:graphicData uri="http://schemas.openxmlformats.org/drawingml/2006/chart">
-            <c:chart xmlns:r="http://schemas.openxmlformats.org/officeDocument/2006/relationships" xmlns:c="http://schemas.openxmlformats.org/drawingml/2006/chart" r:id="R8616dafde98046b3"/>
+            <c:chart xmlns:r="http://schemas.openxmlformats.org/officeDocument/2006/relationships" xmlns:c="http://schemas.openxmlformats.org/drawingml/2006/chart" r:id="R6caf2f5d44d84357"/>
           </a:graphicData>
         </a:graphic>
       </p:graphicFrame>
@@ -3771,8 +3775,8 @@
       <p:grpSpPr/>
       <p:sp>
         <p:nvSpPr>
-          <p:cNvPr id="10025" name="TextBox 1"/>
-          <p:cNvSpPr/>
+          <p:cNvPr id="100025" name="TextBox 1"/>
+          <p:cNvSpPr txBox="1"/>
           <p:nvPr/>
         </p:nvSpPr>
         <p:spPr>
@@ -3799,7 +3803,7 @@
       </p:sp>
       <p:graphicFrame>
         <p:nvGraphicFramePr>
-          <p:cNvPr id="10026" name="firstSliceAngle=0"/>
+          <p:cNvPr id="100026" name="firstSliceAngle=0"/>
           <p:cNvGraphicFramePr/>
           <p:nvPr/>
         </p:nvGraphicFramePr>
@@ -3809,13 +3813,13 @@
         </p:xfrm>
         <a:graphic xmlns:a="http://schemas.openxmlformats.org/drawingml/2006/main">
           <a:graphicData uri="http://schemas.openxmlformats.org/drawingml/2006/chart">
-            <c:chart xmlns:r="http://schemas.openxmlformats.org/officeDocument/2006/relationships" xmlns:c="http://schemas.openxmlformats.org/drawingml/2006/chart" r:id="Rc1f22038537d4e4d"/>
+            <c:chart xmlns:r="http://schemas.openxmlformats.org/officeDocument/2006/relationships" xmlns:c="http://schemas.openxmlformats.org/drawingml/2006/chart" r:id="R9a897a2263564bec"/>
           </a:graphicData>
         </a:graphic>
       </p:graphicFrame>
       <p:graphicFrame>
         <p:nvGraphicFramePr>
-          <p:cNvPr id="10027" name="firstSliceAngle=90"/>
+          <p:cNvPr id="100027" name="firstSliceAngle=90"/>
           <p:cNvGraphicFramePr/>
           <p:nvPr/>
         </p:nvGraphicFramePr>
@@ -3825,13 +3829,13 @@
         </p:xfrm>
         <a:graphic xmlns:a="http://schemas.openxmlformats.org/drawingml/2006/main">
           <a:graphicData uri="http://schemas.openxmlformats.org/drawingml/2006/chart">
-            <c:chart xmlns:r="http://schemas.openxmlformats.org/officeDocument/2006/relationships" xmlns:c="http://schemas.openxmlformats.org/drawingml/2006/chart" r:id="R44e1bce7717445db"/>
+            <c:chart xmlns:r="http://schemas.openxmlformats.org/officeDocument/2006/relationships" xmlns:c="http://schemas.openxmlformats.org/drawingml/2006/chart" r:id="R84361497bb2c4f62"/>
           </a:graphicData>
         </a:graphic>
       </p:graphicFrame>
       <p:graphicFrame>
         <p:nvGraphicFramePr>
-          <p:cNvPr id="10028" name="firstSliceAngle=180"/>
+          <p:cNvPr id="100028" name="firstSliceAngle=180"/>
           <p:cNvGraphicFramePr/>
           <p:nvPr/>
         </p:nvGraphicFramePr>
@@ -3841,13 +3845,13 @@
         </p:xfrm>
         <a:graphic xmlns:a="http://schemas.openxmlformats.org/drawingml/2006/main">
           <a:graphicData uri="http://schemas.openxmlformats.org/drawingml/2006/chart">
-            <c:chart xmlns:r="http://schemas.openxmlformats.org/officeDocument/2006/relationships" xmlns:c="http://schemas.openxmlformats.org/drawingml/2006/chart" r:id="Red49ca42b4264f08"/>
+            <c:chart xmlns:r="http://schemas.openxmlformats.org/officeDocument/2006/relationships" xmlns:c="http://schemas.openxmlformats.org/drawingml/2006/chart" r:id="R6011c15af94b4a0e"/>
           </a:graphicData>
         </a:graphic>
       </p:graphicFrame>
       <p:graphicFrame>
         <p:nvGraphicFramePr>
-          <p:cNvPr id="10029" name="firstSliceAngle=270"/>
+          <p:cNvPr id="100029" name="firstSliceAngle=270"/>
           <p:cNvGraphicFramePr/>
           <p:nvPr/>
         </p:nvGraphicFramePr>
@@ -3857,7 +3861,7 @@
         </p:xfrm>
         <a:graphic xmlns:a="http://schemas.openxmlformats.org/drawingml/2006/main">
           <a:graphicData uri="http://schemas.openxmlformats.org/drawingml/2006/chart">
-            <c:chart xmlns:r="http://schemas.openxmlformats.org/officeDocument/2006/relationships" xmlns:c="http://schemas.openxmlformats.org/drawingml/2006/chart" r:id="R934e43c7cb5b456d"/>
+            <c:chart xmlns:r="http://schemas.openxmlformats.org/officeDocument/2006/relationships" xmlns:c="http://schemas.openxmlformats.org/drawingml/2006/chart" r:id="R05543ada79e542cb"/>
           </a:graphicData>
         </a:graphic>
       </p:graphicFrame>
@@ -3878,8 +3882,8 @@
       <p:grpSpPr/>
       <p:sp>
         <p:nvSpPr>
-          <p:cNvPr id="10030" name="TextBox 1"/>
-          <p:cNvSpPr/>
+          <p:cNvPr id="100030" name="TextBox 1"/>
+          <p:cNvSpPr txBox="1"/>
           <p:nvPr/>
         </p:nvSpPr>
         <p:spPr>
@@ -3906,7 +3910,7 @@
       </p:sp>
       <p:graphicFrame>
         <p:nvGraphicFramePr>
-          <p:cNvPr id="10031" name="chartareafill + chartborder"/>
+          <p:cNvPr id="100031" name="chartareafill + chartborder"/>
           <p:cNvGraphicFramePr/>
           <p:nvPr/>
         </p:nvGraphicFramePr>
@@ -3916,13 +3920,13 @@
         </p:xfrm>
         <a:graphic xmlns:a="http://schemas.openxmlformats.org/drawingml/2006/main">
           <a:graphicData uri="http://schemas.openxmlformats.org/drawingml/2006/chart">
-            <c:chart xmlns:r="http://schemas.openxmlformats.org/officeDocument/2006/relationships" xmlns:c="http://schemas.openxmlformats.org/drawingml/2006/chart" r:id="R00b952052e994c83"/>
+            <c:chart xmlns:r="http://schemas.openxmlformats.org/officeDocument/2006/relationships" xmlns:c="http://schemas.openxmlformats.org/drawingml/2006/chart" r:id="R690c40c7ec8d4901"/>
           </a:graphicData>
         </a:graphic>
       </p:graphicFrame>
       <p:graphicFrame>
         <p:nvGraphicFramePr>
-          <p:cNvPr id="10032" name="roundedcorners=true"/>
+          <p:cNvPr id="100032" name="roundedcorners=true"/>
           <p:cNvGraphicFramePr/>
           <p:nvPr/>
         </p:nvGraphicFramePr>
@@ -3932,13 +3936,13 @@
         </p:xfrm>
         <a:graphic xmlns:a="http://schemas.openxmlformats.org/drawingml/2006/main">
           <a:graphicData uri="http://schemas.openxmlformats.org/drawingml/2006/chart">
-            <c:chart xmlns:r="http://schemas.openxmlformats.org/officeDocument/2006/relationships" xmlns:c="http://schemas.openxmlformats.org/drawingml/2006/chart" r:id="Rf816b328a27b4932"/>
+            <c:chart xmlns:r="http://schemas.openxmlformats.org/officeDocument/2006/relationships" xmlns:c="http://schemas.openxmlformats.org/drawingml/2006/chart" r:id="R9f5df2947aef4294"/>
           </a:graphicData>
         </a:graphic>
       </p:graphicFrame>
       <p:graphicFrame>
         <p:nvGraphicFramePr>
-          <p:cNvPr id="10033" name="plotFill=none"/>
+          <p:cNvPr id="100033" name="plotFill=none"/>
           <p:cNvGraphicFramePr/>
           <p:nvPr/>
         </p:nvGraphicFramePr>
@@ -3948,13 +3952,13 @@
         </p:xfrm>
         <a:graphic xmlns:a="http://schemas.openxmlformats.org/drawingml/2006/main">
           <a:graphicData uri="http://schemas.openxmlformats.org/drawingml/2006/chart">
-            <c:chart xmlns:r="http://schemas.openxmlformats.org/officeDocument/2006/relationships" xmlns:c="http://schemas.openxmlformats.org/drawingml/2006/chart" r:id="R71622db78f184168"/>
+            <c:chart xmlns:r="http://schemas.openxmlformats.org/officeDocument/2006/relationships" xmlns:c="http://schemas.openxmlformats.org/drawingml/2006/chart" r:id="R7d041aa59f6c4ba8"/>
           </a:graphicData>
         </a:graphic>
       </p:graphicFrame>
       <p:graphicFrame>
         <p:nvGraphicFramePr>
-          <p:cNvPr id="10034" name="chartareafill=none"/>
+          <p:cNvPr id="100034" name="chartareafill=none"/>
           <p:cNvGraphicFramePr/>
           <p:nvPr/>
         </p:nvGraphicFramePr>
@@ -3964,7 +3968,7 @@
         </p:xfrm>
         <a:graphic xmlns:a="http://schemas.openxmlformats.org/drawingml/2006/main">
           <a:graphicData uri="http://schemas.openxmlformats.org/drawingml/2006/chart">
-            <c:chart xmlns:r="http://schemas.openxmlformats.org/officeDocument/2006/relationships" xmlns:c="http://schemas.openxmlformats.org/drawingml/2006/chart" r:id="R6df4cb7d3c294875"/>
+            <c:chart xmlns:r="http://schemas.openxmlformats.org/officeDocument/2006/relationships" xmlns:c="http://schemas.openxmlformats.org/drawingml/2006/chart" r:id="R89ff784823c747d5"/>
           </a:graphicData>
         </a:graphic>
       </p:graphicFrame>
@@ -3985,8 +3989,8 @@
       <p:grpSpPr/>
       <p:sp>
         <p:nvSpPr>
-          <p:cNvPr id="10035" name="TextBox 1"/>
-          <p:cNvSpPr/>
+          <p:cNvPr id="100035" name="TextBox 1"/>
+          <p:cNvSpPr txBox="1"/>
           <p:nvPr/>
         </p:nvSpPr>
         <p:spPr>
@@ -4013,7 +4017,7 @@
       </p:sp>
       <p:graphicFrame>
         <p:nvGraphicFramePr>
-          <p:cNvPr id="10036" name="preset=minimal"/>
+          <p:cNvPr id="100036" name="preset=minimal"/>
           <p:cNvGraphicFramePr/>
           <p:nvPr/>
         </p:nvGraphicFramePr>
@@ -4023,13 +4027,13 @@
         </p:xfrm>
         <a:graphic xmlns:a="http://schemas.openxmlformats.org/drawingml/2006/main">
           <a:graphicData uri="http://schemas.openxmlformats.org/drawingml/2006/chart">
-            <c:chart xmlns:r="http://schemas.openxmlformats.org/officeDocument/2006/relationships" xmlns:c="http://schemas.openxmlformats.org/drawingml/2006/chart" r:id="R48b373a9cc0a4973"/>
+            <c:chart xmlns:r="http://schemas.openxmlformats.org/officeDocument/2006/relationships" xmlns:c="http://schemas.openxmlformats.org/drawingml/2006/chart" r:id="Rfad3b99c1535445a"/>
           </a:graphicData>
         </a:graphic>
       </p:graphicFrame>
       <p:graphicFrame>
         <p:nvGraphicFramePr>
-          <p:cNvPr id="10037" name="preset=dark"/>
+          <p:cNvPr id="100037" name="preset=dark"/>
           <p:cNvGraphicFramePr/>
           <p:nvPr/>
         </p:nvGraphicFramePr>
@@ -4039,13 +4043,13 @@
         </p:xfrm>
         <a:graphic xmlns:a="http://schemas.openxmlformats.org/drawingml/2006/main">
           <a:graphicData uri="http://schemas.openxmlformats.org/drawingml/2006/chart">
-            <c:chart xmlns:r="http://schemas.openxmlformats.org/officeDocument/2006/relationships" xmlns:c="http://schemas.openxmlformats.org/drawingml/2006/chart" r:id="R2feec2027d1243d1"/>
+            <c:chart xmlns:r="http://schemas.openxmlformats.org/officeDocument/2006/relationships" xmlns:c="http://schemas.openxmlformats.org/drawingml/2006/chart" r:id="Rf9ce3f6bd66f4e29"/>
           </a:graphicData>
         </a:graphic>
       </p:graphicFrame>
       <p:graphicFrame>
         <p:nvGraphicFramePr>
-          <p:cNvPr id="10038" name="preset=corporate"/>
+          <p:cNvPr id="100038" name="preset=corporate"/>
           <p:cNvGraphicFramePr/>
           <p:nvPr/>
         </p:nvGraphicFramePr>
@@ -4055,13 +4059,13 @@
         </p:xfrm>
         <a:graphic xmlns:a="http://schemas.openxmlformats.org/drawingml/2006/main">
           <a:graphicData uri="http://schemas.openxmlformats.org/drawingml/2006/chart">
-            <c:chart xmlns:r="http://schemas.openxmlformats.org/officeDocument/2006/relationships" xmlns:c="http://schemas.openxmlformats.org/drawingml/2006/chart" r:id="R47a538d581e84789"/>
+            <c:chart xmlns:r="http://schemas.openxmlformats.org/officeDocument/2006/relationships" xmlns:c="http://schemas.openxmlformats.org/drawingml/2006/chart" r:id="Rd22bb2d0b131425a"/>
           </a:graphicData>
         </a:graphic>
       </p:graphicFrame>
       <p:graphicFrame>
         <p:nvGraphicFramePr>
-          <p:cNvPr id="10039" name="chart-series Set name+color"/>
+          <p:cNvPr id="100039" name="chart-series Set name+color"/>
           <p:cNvGraphicFramePr/>
           <p:nvPr/>
         </p:nvGraphicFramePr>
@@ -4071,7 +4075,7 @@
         </p:xfrm>
         <a:graphic xmlns:a="http://schemas.openxmlformats.org/drawingml/2006/main">
           <a:graphicData uri="http://schemas.openxmlformats.org/drawingml/2006/chart">
-            <c:chart xmlns:r="http://schemas.openxmlformats.org/officeDocument/2006/relationships" xmlns:c="http://schemas.openxmlformats.org/drawingml/2006/chart" r:id="R035ab6a5b5594856"/>
+            <c:chart xmlns:r="http://schemas.openxmlformats.org/officeDocument/2006/relationships" xmlns:c="http://schemas.openxmlformats.org/drawingml/2006/chart" r:id="R4dd7dd3f54dd4036"/>
           </a:graphicData>
         </a:graphic>
       </p:graphicFrame>
